--- a/media/figstudio/fig03_roadmap/fig03_research_roadmap_en_editable.pptx
+++ b/media/figstudio/fig03_roadmap/fig03_research_roadmap_en_editable.pptx
@@ -3535,7 +3535,7 @@
           <a:solidFill>
             <a:srgbClr val="EEF2F7"/>
           </a:solidFill>
-          <a:ln w="9524">
+          <a:ln w="12699">
             <a:solidFill>
               <a:srgbClr val="5B7592"/>
             </a:solidFill>
@@ -3639,7 +3639,7 @@
           <a:solidFill>
             <a:srgbClr val="E6F2F3"/>
           </a:solidFill>
-          <a:ln w="9524">
+          <a:ln w="12699">
             <a:solidFill>
               <a:srgbClr val="1F7F8C"/>
             </a:solidFill>
@@ -3743,7 +3743,7 @@
           <a:solidFill>
             <a:srgbClr val="EEF2F7"/>
           </a:solidFill>
-          <a:ln w="9524">
+          <a:ln w="12699">
             <a:solidFill>
               <a:srgbClr val="5B7592"/>
             </a:solidFill>
@@ -3847,7 +3847,7 @@
           <a:solidFill>
             <a:srgbClr val="FFF6E3"/>
           </a:solidFill>
-          <a:ln w="9524">
+          <a:ln w="12699">
             <a:solidFill>
               <a:srgbClr val="C48A24"/>
             </a:solidFill>
@@ -3951,7 +3951,7 @@
           <a:solidFill>
             <a:srgbClr val="FFFFFF"/>
           </a:solidFill>
-          <a:ln w="11112">
+          <a:ln w="15081">
             <a:solidFill>
               <a:srgbClr val="5B7592"/>
             </a:solidFill>
@@ -4041,9 +4041,9 @@
             <a:avLst/>
           </a:prstGeom>
           <a:noFill/>
-          <a:ln w="7937">
+          <a:ln w="18216">
             <a:solidFill>
-              <a:srgbClr val="1F2937"/>
+              <a:srgbClr val="111A24"/>
             </a:solidFill>
           </a:ln>
           <a:effectLst/>
@@ -4085,9 +4085,9 @@
             <a:avLst/>
           </a:prstGeom>
           <a:noFill/>
-          <a:ln w="7937">
+          <a:ln w="18216">
             <a:solidFill>
-              <a:srgbClr val="1F2937"/>
+              <a:srgbClr val="111A24"/>
             </a:solidFill>
           </a:ln>
           <a:effectLst/>
@@ -4129,9 +4129,9 @@
             <a:avLst/>
           </a:prstGeom>
           <a:noFill/>
-          <a:ln w="7937">
+          <a:ln w="18216">
             <a:solidFill>
-              <a:srgbClr val="1F2937"/>
+              <a:srgbClr val="111A24"/>
             </a:solidFill>
           </a:ln>
           <a:effectLst/>
@@ -4172,9 +4172,9 @@
           <a:prstGeom prst="line">
             <a:avLst/>
           </a:prstGeom>
-          <a:ln w="7937">
+          <a:ln w="18216">
             <a:solidFill>
-              <a:srgbClr val="1F2937"/>
+              <a:srgbClr val="111A24"/>
             </a:solidFill>
           </a:ln>
           <a:effectLst/>
@@ -4208,9 +4208,9 @@
           <a:prstGeom prst="line">
             <a:avLst/>
           </a:prstGeom>
-          <a:ln w="7937">
+          <a:ln w="18216">
             <a:solidFill>
-              <a:srgbClr val="1F2937"/>
+              <a:srgbClr val="111A24"/>
             </a:solidFill>
           </a:ln>
           <a:effectLst/>
@@ -4244,9 +4244,9 @@
           <a:prstGeom prst="line">
             <a:avLst/>
           </a:prstGeom>
-          <a:ln w="7937">
+          <a:ln w="18216">
             <a:solidFill>
-              <a:srgbClr val="1F2937"/>
+              <a:srgbClr val="111A24"/>
             </a:solidFill>
           </a:ln>
           <a:effectLst/>
@@ -4339,11 +4339,11 @@
             </a:avLst>
           </a:prstGeom>
           <a:solidFill>
-            <a:srgbClr val="F7F9FB"/>
+            <a:srgbClr val="F4F7FA"/>
           </a:solidFill>
-          <a:ln w="9524">
+          <a:ln w="12699">
             <a:solidFill>
-              <a:srgbClr val="CBD3DA"/>
+              <a:srgbClr val="AEBBC7"/>
             </a:solidFill>
           </a:ln>
           <a:effectLst/>
@@ -4403,9 +4403,9 @@
               <a:spcAft>
                 <a:spcPts val="0"/>
               </a:spcAft>
-              <a:defRPr sz="1187" b="0" i="0" lang="zh-CN" dirty="0">
+              <a:defRPr sz="1187" b="1" i="0" lang="zh-CN" dirty="0">
                 <a:solidFill>
-                  <a:srgbClr val="3F4854"/>
+                  <a:srgbClr val="27303A"/>
                 </a:solidFill>
                 <a:latin typeface="DejaVu Sans"/>
                 <a:ea typeface="DejaVu Sans"/>
@@ -4413,9 +4413,9 @@
               </a:defRPr>
             </a:pPr>
             <a:r>
-              <a:rPr sz="1187" b="0" i="0" lang="zh-CN" dirty="0">
+              <a:rPr sz="1187" b="1" i="0" lang="zh-CN" dirty="0">
                 <a:solidFill>
-                  <a:srgbClr val="3F4854"/>
+                  <a:srgbClr val="27303A"/>
                 </a:solidFill>
                 <a:latin typeface="DejaVu Sans"/>
                 <a:ea typeface="DejaVu Sans"/>
@@ -4443,11 +4443,11 @@
             </a:avLst>
           </a:prstGeom>
           <a:solidFill>
-            <a:srgbClr val="F7F9FB"/>
+            <a:srgbClr val="F4F7FA"/>
           </a:solidFill>
-          <a:ln w="9524">
+          <a:ln w="12699">
             <a:solidFill>
-              <a:srgbClr val="CBD3DA"/>
+              <a:srgbClr val="AEBBC7"/>
             </a:solidFill>
           </a:ln>
           <a:effectLst/>
@@ -4507,9 +4507,9 @@
               <a:spcAft>
                 <a:spcPts val="0"/>
               </a:spcAft>
-              <a:defRPr sz="1187" b="0" i="0" lang="zh-CN" dirty="0">
+              <a:defRPr sz="1187" b="1" i="0" lang="zh-CN" dirty="0">
                 <a:solidFill>
-                  <a:srgbClr val="3F4854"/>
+                  <a:srgbClr val="27303A"/>
                 </a:solidFill>
                 <a:latin typeface="DejaVu Sans"/>
                 <a:ea typeface="DejaVu Sans"/>
@@ -4517,9 +4517,9 @@
               </a:defRPr>
             </a:pPr>
             <a:r>
-              <a:rPr sz="1187" b="0" i="0" lang="zh-CN" dirty="0">
+              <a:rPr sz="1187" b="1" i="0" lang="zh-CN" dirty="0">
                 <a:solidFill>
-                  <a:srgbClr val="3F4854"/>
+                  <a:srgbClr val="27303A"/>
                 </a:solidFill>
                 <a:latin typeface="DejaVu Sans"/>
                 <a:ea typeface="DejaVu Sans"/>
@@ -4547,11 +4547,11 @@
             </a:avLst>
           </a:prstGeom>
           <a:solidFill>
-            <a:srgbClr val="F7F9FB"/>
+            <a:srgbClr val="F4F7FA"/>
           </a:solidFill>
-          <a:ln w="9524">
+          <a:ln w="12699">
             <a:solidFill>
-              <a:srgbClr val="CBD3DA"/>
+              <a:srgbClr val="AEBBC7"/>
             </a:solidFill>
           </a:ln>
           <a:effectLst/>
@@ -4611,9 +4611,9 @@
               <a:spcAft>
                 <a:spcPts val="0"/>
               </a:spcAft>
-              <a:defRPr sz="1187" b="0" i="0" lang="zh-CN" dirty="0">
+              <a:defRPr sz="1187" b="1" i="0" lang="zh-CN" dirty="0">
                 <a:solidFill>
-                  <a:srgbClr val="3F4854"/>
+                  <a:srgbClr val="27303A"/>
                 </a:solidFill>
                 <a:latin typeface="DejaVu Sans"/>
                 <a:ea typeface="DejaVu Sans"/>
@@ -4621,9 +4621,9 @@
               </a:defRPr>
             </a:pPr>
             <a:r>
-              <a:rPr sz="1187" b="0" i="0" lang="zh-CN" dirty="0">
+              <a:rPr sz="1187" b="1" i="0" lang="zh-CN" dirty="0">
                 <a:solidFill>
-                  <a:srgbClr val="3F4854"/>
+                  <a:srgbClr val="27303A"/>
                 </a:solidFill>
                 <a:latin typeface="DejaVu Sans"/>
                 <a:ea typeface="DejaVu Sans"/>
@@ -4653,7 +4653,7 @@
           <a:solidFill>
             <a:srgbClr val="FFFFFF"/>
           </a:solidFill>
-          <a:ln w="11112">
+          <a:ln w="15081">
             <a:solidFill>
               <a:srgbClr val="5B7592"/>
             </a:solidFill>
@@ -4742,9 +4742,9 @@
           <a:prstGeom prst="line">
             <a:avLst/>
           </a:prstGeom>
-          <a:ln w="7937">
+          <a:ln w="18216">
             <a:solidFill>
-              <a:srgbClr val="1F2937"/>
+              <a:srgbClr val="111A24"/>
             </a:solidFill>
           </a:ln>
           <a:effectLst/>
@@ -4778,9 +4778,9 @@
           <a:prstGeom prst="line">
             <a:avLst/>
           </a:prstGeom>
-          <a:ln w="7937">
+          <a:ln w="18216">
             <a:solidFill>
-              <a:srgbClr val="1F2937"/>
+              <a:srgbClr val="111A24"/>
             </a:solidFill>
           </a:ln>
           <a:effectLst/>
@@ -4814,9 +4814,9 @@
           <a:prstGeom prst="line">
             <a:avLst/>
           </a:prstGeom>
-          <a:ln w="7937">
+          <a:ln w="18216">
             <a:solidFill>
-              <a:srgbClr val="1F2937"/>
+              <a:srgbClr val="111A24"/>
             </a:solidFill>
           </a:ln>
           <a:effectLst/>
@@ -4850,9 +4850,9 @@
           <a:prstGeom prst="line">
             <a:avLst/>
           </a:prstGeom>
-          <a:ln w="7937">
+          <a:ln w="18216">
             <a:solidFill>
-              <a:srgbClr val="1F2937"/>
+              <a:srgbClr val="111A24"/>
             </a:solidFill>
           </a:ln>
           <a:effectLst/>
@@ -4886,9 +4886,9 @@
           <a:prstGeom prst="line">
             <a:avLst/>
           </a:prstGeom>
-          <a:ln w="7937">
+          <a:ln w="18216">
             <a:solidFill>
-              <a:srgbClr val="1F2937"/>
+              <a:srgbClr val="111A24"/>
             </a:solidFill>
           </a:ln>
           <a:effectLst/>
@@ -4922,9 +4922,9 @@
           <a:prstGeom prst="line">
             <a:avLst/>
           </a:prstGeom>
-          <a:ln w="7937">
+          <a:ln w="18216">
             <a:solidFill>
-              <a:srgbClr val="1F2937"/>
+              <a:srgbClr val="111A24"/>
             </a:solidFill>
           </a:ln>
           <a:effectLst/>
@@ -4958,9 +4958,9 @@
           <a:prstGeom prst="line">
             <a:avLst/>
           </a:prstGeom>
-          <a:ln w="7937">
+          <a:ln w="18216">
             <a:solidFill>
-              <a:srgbClr val="1F2937"/>
+              <a:srgbClr val="111A24"/>
             </a:solidFill>
           </a:ln>
           <a:effectLst/>
@@ -5053,11 +5053,11 @@
             </a:avLst>
           </a:prstGeom>
           <a:solidFill>
-            <a:srgbClr val="F7F9FB"/>
+            <a:srgbClr val="F4F7FA"/>
           </a:solidFill>
-          <a:ln w="9524">
+          <a:ln w="12699">
             <a:solidFill>
-              <a:srgbClr val="CBD3DA"/>
+              <a:srgbClr val="AEBBC7"/>
             </a:solidFill>
           </a:ln>
           <a:effectLst/>
@@ -5117,9 +5117,9 @@
               <a:spcAft>
                 <a:spcPts val="0"/>
               </a:spcAft>
-              <a:defRPr sz="1187" b="0" i="0" lang="zh-CN" dirty="0">
+              <a:defRPr sz="1187" b="1" i="0" lang="zh-CN" dirty="0">
                 <a:solidFill>
-                  <a:srgbClr val="3F4854"/>
+                  <a:srgbClr val="27303A"/>
                 </a:solidFill>
                 <a:latin typeface="DejaVu Sans"/>
                 <a:ea typeface="DejaVu Sans"/>
@@ -5127,9 +5127,9 @@
               </a:defRPr>
             </a:pPr>
             <a:r>
-              <a:rPr sz="1187" b="0" i="0" lang="zh-CN" dirty="0">
+              <a:rPr sz="1187" b="1" i="0" lang="zh-CN" dirty="0">
                 <a:solidFill>
-                  <a:srgbClr val="3F4854"/>
+                  <a:srgbClr val="27303A"/>
                 </a:solidFill>
                 <a:latin typeface="DejaVu Sans"/>
                 <a:ea typeface="DejaVu Sans"/>
@@ -5157,11 +5157,11 @@
             </a:avLst>
           </a:prstGeom>
           <a:solidFill>
-            <a:srgbClr val="F7F9FB"/>
+            <a:srgbClr val="F4F7FA"/>
           </a:solidFill>
-          <a:ln w="9524">
+          <a:ln w="12699">
             <a:solidFill>
-              <a:srgbClr val="CBD3DA"/>
+              <a:srgbClr val="AEBBC7"/>
             </a:solidFill>
           </a:ln>
           <a:effectLst/>
@@ -5221,9 +5221,9 @@
               <a:spcAft>
                 <a:spcPts val="0"/>
               </a:spcAft>
-              <a:defRPr sz="1187" b="0" i="0" lang="zh-CN" dirty="0">
+              <a:defRPr sz="1187" b="1" i="0" lang="zh-CN" dirty="0">
                 <a:solidFill>
-                  <a:srgbClr val="3F4854"/>
+                  <a:srgbClr val="27303A"/>
                 </a:solidFill>
                 <a:latin typeface="DejaVu Sans"/>
                 <a:ea typeface="DejaVu Sans"/>
@@ -5231,9 +5231,9 @@
               </a:defRPr>
             </a:pPr>
             <a:r>
-              <a:rPr sz="1187" b="0" i="0" lang="zh-CN" dirty="0">
+              <a:rPr sz="1187" b="1" i="0" lang="zh-CN" dirty="0">
                 <a:solidFill>
-                  <a:srgbClr val="3F4854"/>
+                  <a:srgbClr val="27303A"/>
                 </a:solidFill>
                 <a:latin typeface="DejaVu Sans"/>
                 <a:ea typeface="DejaVu Sans"/>
@@ -5261,11 +5261,11 @@
             </a:avLst>
           </a:prstGeom>
           <a:solidFill>
-            <a:srgbClr val="F7F9FB"/>
+            <a:srgbClr val="F4F7FA"/>
           </a:solidFill>
-          <a:ln w="9524">
+          <a:ln w="12699">
             <a:solidFill>
-              <a:srgbClr val="CBD3DA"/>
+              <a:srgbClr val="AEBBC7"/>
             </a:solidFill>
           </a:ln>
           <a:effectLst/>
@@ -5325,9 +5325,9 @@
               <a:spcAft>
                 <a:spcPts val="0"/>
               </a:spcAft>
-              <a:defRPr sz="1187" b="0" i="0" lang="zh-CN" dirty="0">
+              <a:defRPr sz="1187" b="1" i="0" lang="zh-CN" dirty="0">
                 <a:solidFill>
-                  <a:srgbClr val="3F4854"/>
+                  <a:srgbClr val="27303A"/>
                 </a:solidFill>
                 <a:latin typeface="DejaVu Sans"/>
                 <a:ea typeface="DejaVu Sans"/>
@@ -5335,9 +5335,9 @@
               </a:defRPr>
             </a:pPr>
             <a:r>
-              <a:rPr sz="1187" b="0" i="0" lang="zh-CN" dirty="0">
+              <a:rPr sz="1187" b="1" i="0" lang="zh-CN" dirty="0">
                 <a:solidFill>
-                  <a:srgbClr val="3F4854"/>
+                  <a:srgbClr val="27303A"/>
                 </a:solidFill>
                 <a:latin typeface="DejaVu Sans"/>
                 <a:ea typeface="DejaVu Sans"/>
@@ -5367,7 +5367,7 @@
           <a:solidFill>
             <a:srgbClr val="FFFFFF"/>
           </a:solidFill>
-          <a:ln w="11112">
+          <a:ln w="15081">
             <a:solidFill>
               <a:srgbClr val="5B7592"/>
             </a:solidFill>
@@ -5456,9 +5456,9 @@
           <a:prstGeom prst="line">
             <a:avLst/>
           </a:prstGeom>
-          <a:ln w="7937">
+          <a:ln w="18216">
             <a:solidFill>
-              <a:srgbClr val="1F2937"/>
+              <a:srgbClr val="111A24"/>
             </a:solidFill>
           </a:ln>
           <a:effectLst/>
@@ -5492,9 +5492,9 @@
           <a:prstGeom prst="line">
             <a:avLst/>
           </a:prstGeom>
-          <a:ln w="7937">
+          <a:ln w="18216">
             <a:solidFill>
-              <a:srgbClr val="1F2937"/>
+              <a:srgbClr val="111A24"/>
             </a:solidFill>
           </a:ln>
           <a:effectLst/>
@@ -5528,9 +5528,9 @@
           <a:prstGeom prst="line">
             <a:avLst/>
           </a:prstGeom>
-          <a:ln w="7937">
+          <a:ln w="18216">
             <a:solidFill>
-              <a:srgbClr val="1F2937"/>
+              <a:srgbClr val="111A24"/>
             </a:solidFill>
           </a:ln>
           <a:effectLst/>
@@ -5564,9 +5564,9 @@
           <a:prstGeom prst="line">
             <a:avLst/>
           </a:prstGeom>
-          <a:ln w="7937">
+          <a:ln w="18216">
             <a:solidFill>
-              <a:srgbClr val="1F2937"/>
+              <a:srgbClr val="111A24"/>
             </a:solidFill>
           </a:ln>
           <a:effectLst/>
@@ -5600,9 +5600,9 @@
           <a:prstGeom prst="line">
             <a:avLst/>
           </a:prstGeom>
-          <a:ln w="7937">
+          <a:ln w="18216">
             <a:solidFill>
-              <a:srgbClr val="1F2937"/>
+              <a:srgbClr val="111A24"/>
             </a:solidFill>
           </a:ln>
           <a:effectLst/>
@@ -5636,9 +5636,9 @@
           <a:prstGeom prst="line">
             <a:avLst/>
           </a:prstGeom>
-          <a:ln w="7937">
+          <a:ln w="18216">
             <a:solidFill>
-              <a:srgbClr val="1F2937"/>
+              <a:srgbClr val="111A24"/>
             </a:solidFill>
           </a:ln>
           <a:effectLst/>
@@ -5731,11 +5731,11 @@
             </a:avLst>
           </a:prstGeom>
           <a:solidFill>
-            <a:srgbClr val="F7F9FB"/>
+            <a:srgbClr val="F4F7FA"/>
           </a:solidFill>
-          <a:ln w="9524">
+          <a:ln w="12699">
             <a:solidFill>
-              <a:srgbClr val="CBD3DA"/>
+              <a:srgbClr val="AEBBC7"/>
             </a:solidFill>
           </a:ln>
           <a:effectLst/>
@@ -5771,6 +5771,214 @@
         <p:spPr>
           <a:xfrm>
             <a:off x="8659812" y="1301749"/>
+            <a:ext cx="3143249" cy="357187"/>
+          </a:xfrm>
+          <a:prstGeom prst="rect">
+            <a:avLst/>
+          </a:prstGeom>
+          <a:noFill/>
+          <a:effectLst/>
+        </p:spPr>
+        <p:txBody>
+          <a:bodyPr wrap="none" anchor="ctr" tIns="0" rIns="0" bIns="0" lIns="0" anchorCtr="0" vertOverflow="overflow">
+            <a:noAutofit/>
+          </a:bodyPr>
+          <a:lstStyle/>
+          <a:p>
+            <a:pPr algn="ctr" fontAlgn="base">
+              <a:lnSpc>
+                <a:spcPts val="1343"/>
+              </a:lnSpc>
+              <a:spcBef>
+                <a:spcPts val="0"/>
+              </a:spcBef>
+              <a:spcAft>
+                <a:spcPts val="0"/>
+              </a:spcAft>
+              <a:defRPr sz="1128" b="1" i="0" lang="zh-CN" dirty="0">
+                <a:solidFill>
+                  <a:srgbClr val="27303A"/>
+                </a:solidFill>
+                <a:latin typeface="DejaVu Sans"/>
+                <a:ea typeface="DejaVu Sans"/>
+                <a:cs typeface="DejaVu Sans"/>
+              </a:defRPr>
+            </a:pPr>
+            <a:r>
+              <a:rPr sz="1128" b="1" i="0" lang="zh-CN" dirty="0">
+                <a:solidFill>
+                  <a:srgbClr val="27303A"/>
+                </a:solidFill>
+                <a:latin typeface="DejaVu Sans"/>
+                <a:ea typeface="DejaVu Sans"/>
+                <a:cs typeface="DejaVu Sans"/>
+              </a:rPr>
+              <a:t>BaCO3 + Y2O3 + SiO2</a:t>
+            </a:r>
+          </a:p>
+        </p:txBody>
+      </p:sp>
+      <p:sp>
+        <p:nvSpPr>
+          <p:cNvPr id="52" name="c3_i1" descr="Editable shape; source id c3_i1"/>
+          <p:cNvSpPr/>
+          <p:nvPr/>
+        </p:nvSpPr>
+        <p:spPr>
+          <a:xfrm>
+            <a:off x="8604249" y="1762124"/>
+            <a:ext cx="3254374" cy="420687"/>
+          </a:xfrm>
+          <a:prstGeom prst="roundRect">
+            <a:avLst>
+              <a:gd name="adj" fmla="val 11320"/>
+            </a:avLst>
+          </a:prstGeom>
+          <a:solidFill>
+            <a:srgbClr val="F4F7FA"/>
+          </a:solidFill>
+          <a:ln w="12699">
+            <a:solidFill>
+              <a:srgbClr val="AEBBC7"/>
+            </a:solidFill>
+          </a:ln>
+          <a:effectLst/>
+        </p:spPr>
+        <p:style>
+          <a:lnRef idx="1">
+            <a:schemeClr val="accent1"/>
+          </a:lnRef>
+          <a:fillRef idx="3">
+            <a:schemeClr val="accent1"/>
+          </a:fillRef>
+          <a:effectRef idx="0">
+            <a:schemeClr val="accent1"/>
+          </a:effectRef>
+          <a:fontRef idx="minor">
+            <a:schemeClr val="lt1"/>
+          </a:fontRef>
+        </p:style>
+        <p:txBody>
+          <a:bodyPr rtlCol="0" anchor="ctr"/>
+          <a:lstStyle/>
+          <a:p>
+            <a:pPr algn="ctr"/>
+          </a:p>
+        </p:txBody>
+      </p:sp>
+      <p:sp>
+        <p:nvSpPr>
+          <p:cNvPr id="53" name="c3_i1_t" descr="Editable text; source id c3_i1_t"/>
+          <p:cNvSpPr txBox="1"/>
+          <p:nvPr/>
+        </p:nvSpPr>
+        <p:spPr>
+          <a:xfrm>
+            <a:off x="8659812" y="1793874"/>
+            <a:ext cx="3143249" cy="357187"/>
+          </a:xfrm>
+          <a:prstGeom prst="rect">
+            <a:avLst/>
+          </a:prstGeom>
+          <a:noFill/>
+          <a:effectLst/>
+        </p:spPr>
+        <p:txBody>
+          <a:bodyPr wrap="none" anchor="ctr" tIns="0" rIns="0" bIns="0" lIns="0" anchorCtr="0" vertOverflow="overflow">
+            <a:noAutofit/>
+          </a:bodyPr>
+          <a:lstStyle/>
+          <a:p>
+            <a:pPr algn="ctr" fontAlgn="base">
+              <a:lnSpc>
+                <a:spcPts val="1343"/>
+              </a:lnSpc>
+              <a:spcBef>
+                <a:spcPts val="0"/>
+              </a:spcBef>
+              <a:spcAft>
+                <a:spcPts val="0"/>
+              </a:spcAft>
+              <a:defRPr sz="1128" b="1" i="0" lang="zh-CN" dirty="0">
+                <a:solidFill>
+                  <a:srgbClr val="27303A"/>
+                </a:solidFill>
+                <a:latin typeface="DejaVu Sans"/>
+                <a:ea typeface="DejaVu Sans"/>
+                <a:cs typeface="DejaVu Sans"/>
+              </a:defRPr>
+            </a:pPr>
+            <a:r>
+              <a:rPr sz="1128" b="1" i="0" lang="zh-CN" dirty="0">
+                <a:solidFill>
+                  <a:srgbClr val="27303A"/>
+                </a:solidFill>
+                <a:latin typeface="DejaVu Sans"/>
+                <a:ea typeface="DejaVu Sans"/>
+                <a:cs typeface="DejaVu Sans"/>
+              </a:rPr>
+              <a:t>ZnO / MgO / Co3O4</a:t>
+            </a:r>
+          </a:p>
+        </p:txBody>
+      </p:sp>
+      <p:sp>
+        <p:nvSpPr>
+          <p:cNvPr id="54" name="c3_i2" descr="Editable shape; source id c3_i2"/>
+          <p:cNvSpPr/>
+          <p:nvPr/>
+        </p:nvSpPr>
+        <p:spPr>
+          <a:xfrm>
+            <a:off x="8604249" y="2262187"/>
+            <a:ext cx="3254374" cy="420687"/>
+          </a:xfrm>
+          <a:prstGeom prst="roundRect">
+            <a:avLst>
+              <a:gd name="adj" fmla="val 11320"/>
+            </a:avLst>
+          </a:prstGeom>
+          <a:solidFill>
+            <a:srgbClr val="F4F7FA"/>
+          </a:solidFill>
+          <a:ln w="12699">
+            <a:solidFill>
+              <a:srgbClr val="AEBBC7"/>
+            </a:solidFill>
+          </a:ln>
+          <a:effectLst/>
+        </p:spPr>
+        <p:style>
+          <a:lnRef idx="1">
+            <a:schemeClr val="accent1"/>
+          </a:lnRef>
+          <a:fillRef idx="3">
+            <a:schemeClr val="accent1"/>
+          </a:fillRef>
+          <a:effectRef idx="0">
+            <a:schemeClr val="accent1"/>
+          </a:effectRef>
+          <a:fontRef idx="minor">
+            <a:schemeClr val="lt1"/>
+          </a:fontRef>
+        </p:style>
+        <p:txBody>
+          <a:bodyPr rtlCol="0" anchor="ctr"/>
+          <a:lstStyle/>
+          <a:p>
+            <a:pPr algn="ctr"/>
+          </a:p>
+        </p:txBody>
+      </p:sp>
+      <p:sp>
+        <p:nvSpPr>
+          <p:cNvPr id="55" name="c3_i2_t" descr="Editable text; source id c3_i2_t"/>
+          <p:cNvSpPr txBox="1"/>
+          <p:nvPr/>
+        </p:nvSpPr>
+        <p:spPr>
+          <a:xfrm>
+            <a:off x="8659812" y="2293937"/>
             <a:ext cx="3143249" cy="357187"/>
           </a:xfrm>
           <a:prstGeom prst="rect">
@@ -5795,9 +6003,9 @@
               <a:spcAft>
                 <a:spcPts val="0"/>
               </a:spcAft>
-              <a:defRPr sz="1187" b="0" i="0" lang="zh-CN" dirty="0">
+              <a:defRPr sz="1187" b="1" i="0" lang="zh-CN" dirty="0">
                 <a:solidFill>
-                  <a:srgbClr val="3F4854"/>
+                  <a:srgbClr val="27303A"/>
                 </a:solidFill>
                 <a:latin typeface="DejaVu Sans"/>
                 <a:ea typeface="DejaVu Sans"/>
@@ -5805,217 +6013,9 @@
               </a:defRPr>
             </a:pPr>
             <a:r>
-              <a:rPr sz="1187" b="0" i="0" lang="zh-CN" dirty="0">
+              <a:rPr sz="1187" b="1" i="0" lang="zh-CN" dirty="0">
                 <a:solidFill>
-                  <a:srgbClr val="3F4854"/>
-                </a:solidFill>
-                <a:latin typeface="DejaVu Sans"/>
-                <a:ea typeface="DejaVu Sans"/>
-                <a:cs typeface="DejaVu Sans"/>
-              </a:rPr>
-              <a:t>BaCO3 + Y2O3 + SiO2</a:t>
-            </a:r>
-          </a:p>
-        </p:txBody>
-      </p:sp>
-      <p:sp>
-        <p:nvSpPr>
-          <p:cNvPr id="52" name="c3_i1" descr="Editable shape; source id c3_i1"/>
-          <p:cNvSpPr/>
-          <p:nvPr/>
-        </p:nvSpPr>
-        <p:spPr>
-          <a:xfrm>
-            <a:off x="8604249" y="1762124"/>
-            <a:ext cx="3254374" cy="420687"/>
-          </a:xfrm>
-          <a:prstGeom prst="roundRect">
-            <a:avLst>
-              <a:gd name="adj" fmla="val 11320"/>
-            </a:avLst>
-          </a:prstGeom>
-          <a:solidFill>
-            <a:srgbClr val="F7F9FB"/>
-          </a:solidFill>
-          <a:ln w="9524">
-            <a:solidFill>
-              <a:srgbClr val="CBD3DA"/>
-            </a:solidFill>
-          </a:ln>
-          <a:effectLst/>
-        </p:spPr>
-        <p:style>
-          <a:lnRef idx="1">
-            <a:schemeClr val="accent1"/>
-          </a:lnRef>
-          <a:fillRef idx="3">
-            <a:schemeClr val="accent1"/>
-          </a:fillRef>
-          <a:effectRef idx="0">
-            <a:schemeClr val="accent1"/>
-          </a:effectRef>
-          <a:fontRef idx="minor">
-            <a:schemeClr val="lt1"/>
-          </a:fontRef>
-        </p:style>
-        <p:txBody>
-          <a:bodyPr rtlCol="0" anchor="ctr"/>
-          <a:lstStyle/>
-          <a:p>
-            <a:pPr algn="ctr"/>
-          </a:p>
-        </p:txBody>
-      </p:sp>
-      <p:sp>
-        <p:nvSpPr>
-          <p:cNvPr id="53" name="c3_i1_t" descr="Editable text; source id c3_i1_t"/>
-          <p:cNvSpPr txBox="1"/>
-          <p:nvPr/>
-        </p:nvSpPr>
-        <p:spPr>
-          <a:xfrm>
-            <a:off x="8659812" y="1793874"/>
-            <a:ext cx="3143249" cy="357187"/>
-          </a:xfrm>
-          <a:prstGeom prst="rect">
-            <a:avLst/>
-          </a:prstGeom>
-          <a:noFill/>
-          <a:effectLst/>
-        </p:spPr>
-        <p:txBody>
-          <a:bodyPr wrap="none" anchor="ctr" tIns="0" rIns="0" bIns="0" lIns="0" anchorCtr="0" vertOverflow="overflow">
-            <a:noAutofit/>
-          </a:bodyPr>
-          <a:lstStyle/>
-          <a:p>
-            <a:pPr algn="ctr" fontAlgn="base">
-              <a:lnSpc>
-                <a:spcPts val="1390"/>
-              </a:lnSpc>
-              <a:spcBef>
-                <a:spcPts val="0"/>
-              </a:spcBef>
-              <a:spcAft>
-                <a:spcPts val="0"/>
-              </a:spcAft>
-              <a:defRPr sz="1187" b="0" i="0" lang="zh-CN" dirty="0">
-                <a:solidFill>
-                  <a:srgbClr val="3F4854"/>
-                </a:solidFill>
-                <a:latin typeface="DejaVu Sans"/>
-                <a:ea typeface="DejaVu Sans"/>
-                <a:cs typeface="DejaVu Sans"/>
-              </a:defRPr>
-            </a:pPr>
-            <a:r>
-              <a:rPr sz="1187" b="0" i="0" lang="zh-CN" dirty="0">
-                <a:solidFill>
-                  <a:srgbClr val="3F4854"/>
-                </a:solidFill>
-                <a:latin typeface="DejaVu Sans"/>
-                <a:ea typeface="DejaVu Sans"/>
-                <a:cs typeface="DejaVu Sans"/>
-              </a:rPr>
-              <a:t>ZnO / MgO / Co3O4</a:t>
-            </a:r>
-          </a:p>
-        </p:txBody>
-      </p:sp>
-      <p:sp>
-        <p:nvSpPr>
-          <p:cNvPr id="54" name="c3_i2" descr="Editable shape; source id c3_i2"/>
-          <p:cNvSpPr/>
-          <p:nvPr/>
-        </p:nvSpPr>
-        <p:spPr>
-          <a:xfrm>
-            <a:off x="8604249" y="2262187"/>
-            <a:ext cx="3254374" cy="420687"/>
-          </a:xfrm>
-          <a:prstGeom prst="roundRect">
-            <a:avLst>
-              <a:gd name="adj" fmla="val 11320"/>
-            </a:avLst>
-          </a:prstGeom>
-          <a:solidFill>
-            <a:srgbClr val="F7F9FB"/>
-          </a:solidFill>
-          <a:ln w="9524">
-            <a:solidFill>
-              <a:srgbClr val="CBD3DA"/>
-            </a:solidFill>
-          </a:ln>
-          <a:effectLst/>
-        </p:spPr>
-        <p:style>
-          <a:lnRef idx="1">
-            <a:schemeClr val="accent1"/>
-          </a:lnRef>
-          <a:fillRef idx="3">
-            <a:schemeClr val="accent1"/>
-          </a:fillRef>
-          <a:effectRef idx="0">
-            <a:schemeClr val="accent1"/>
-          </a:effectRef>
-          <a:fontRef idx="minor">
-            <a:schemeClr val="lt1"/>
-          </a:fontRef>
-        </p:style>
-        <p:txBody>
-          <a:bodyPr rtlCol="0" anchor="ctr"/>
-          <a:lstStyle/>
-          <a:p>
-            <a:pPr algn="ctr"/>
-          </a:p>
-        </p:txBody>
-      </p:sp>
-      <p:sp>
-        <p:nvSpPr>
-          <p:cNvPr id="55" name="c3_i2_t" descr="Editable text; source id c3_i2_t"/>
-          <p:cNvSpPr txBox="1"/>
-          <p:nvPr/>
-        </p:nvSpPr>
-        <p:spPr>
-          <a:xfrm>
-            <a:off x="8659812" y="2293937"/>
-            <a:ext cx="3143249" cy="357187"/>
-          </a:xfrm>
-          <a:prstGeom prst="rect">
-            <a:avLst/>
-          </a:prstGeom>
-          <a:noFill/>
-          <a:effectLst/>
-        </p:spPr>
-        <p:txBody>
-          <a:bodyPr wrap="none" anchor="ctr" tIns="0" rIns="0" bIns="0" lIns="0" anchorCtr="0" vertOverflow="overflow">
-            <a:noAutofit/>
-          </a:bodyPr>
-          <a:lstStyle/>
-          <a:p>
-            <a:pPr algn="ctr" fontAlgn="base">
-              <a:lnSpc>
-                <a:spcPts val="1390"/>
-              </a:lnSpc>
-              <a:spcBef>
-                <a:spcPts val="0"/>
-              </a:spcBef>
-              <a:spcAft>
-                <a:spcPts val="0"/>
-              </a:spcAft>
-              <a:defRPr sz="1187" b="0" i="0" lang="zh-CN" dirty="0">
-                <a:solidFill>
-                  <a:srgbClr val="3F4854"/>
-                </a:solidFill>
-                <a:latin typeface="DejaVu Sans"/>
-                <a:ea typeface="DejaVu Sans"/>
-                <a:cs typeface="DejaVu Sans"/>
-              </a:defRPr>
-            </a:pPr>
-            <a:r>
-              <a:rPr sz="1187" b="0" i="0" lang="zh-CN" dirty="0">
-                <a:solidFill>
-                  <a:srgbClr val="3F4854"/>
+                  <a:srgbClr val="27303A"/>
                 </a:solidFill>
                 <a:latin typeface="DejaVu Sans"/>
                 <a:ea typeface="DejaVu Sans"/>
@@ -6045,7 +6045,7 @@
           <a:solidFill>
             <a:srgbClr val="FFF6E3"/>
           </a:solidFill>
-          <a:ln w="8731">
+          <a:ln w="12699">
             <a:solidFill>
               <a:srgbClr val="C48A24"/>
             </a:solidFill>
@@ -6107,7 +6107,7 @@
               <a:spcAft>
                 <a:spcPts val="0"/>
               </a:spcAft>
-              <a:defRPr sz="1124" b="0" i="0" lang="zh-CN" dirty="0">
+              <a:defRPr sz="1124" b="1" i="0" lang="zh-CN" dirty="0">
                 <a:solidFill>
                   <a:srgbClr val="7A5410"/>
                 </a:solidFill>
@@ -6117,7 +6117,7 @@
               </a:defRPr>
             </a:pPr>
             <a:r>
-              <a:rPr sz="1124" b="0" i="0" lang="zh-CN" dirty="0">
+              <a:rPr sz="1124" b="1" i="0" lang="zh-CN" dirty="0">
                 <a:solidFill>
                   <a:srgbClr val="7A5410"/>
                 </a:solidFill>
@@ -6149,7 +6149,7 @@
           <a:solidFill>
             <a:srgbClr val="FFFFFF"/>
           </a:solidFill>
-          <a:ln w="11112">
+          <a:ln w="15081">
             <a:solidFill>
               <a:srgbClr val="1F7F8C"/>
             </a:solidFill>
@@ -6239,9 +6239,9 @@
             <a:avLst/>
           </a:prstGeom>
           <a:noFill/>
-          <a:ln w="7937">
+          <a:ln w="18216">
             <a:solidFill>
-              <a:srgbClr val="1F2937"/>
+              <a:srgbClr val="111A24"/>
             </a:solidFill>
           </a:ln>
           <a:effectLst/>
@@ -6282,9 +6282,9 @@
           <a:prstGeom prst="line">
             <a:avLst/>
           </a:prstGeom>
-          <a:ln w="7937">
+          <a:ln w="18216">
             <a:solidFill>
-              <a:srgbClr val="1F2937"/>
+              <a:srgbClr val="111A24"/>
             </a:solidFill>
           </a:ln>
           <a:effectLst/>
@@ -6318,9 +6318,9 @@
           <a:prstGeom prst="line">
             <a:avLst/>
           </a:prstGeom>
-          <a:ln w="7937">
+          <a:ln w="18216">
             <a:solidFill>
-              <a:srgbClr val="1F2937"/>
+              <a:srgbClr val="111A24"/>
             </a:solidFill>
           </a:ln>
           <a:effectLst/>
@@ -6354,9 +6354,9 @@
           <a:prstGeom prst="line">
             <a:avLst/>
           </a:prstGeom>
-          <a:ln w="7937">
+          <a:ln w="18216">
             <a:solidFill>
-              <a:srgbClr val="1F2937"/>
+              <a:srgbClr val="111A24"/>
             </a:solidFill>
           </a:ln>
           <a:effectLst/>
@@ -6390,9 +6390,9 @@
           <a:prstGeom prst="line">
             <a:avLst/>
           </a:prstGeom>
-          <a:ln w="7937">
+          <a:ln w="18216">
             <a:solidFill>
-              <a:srgbClr val="1F2937"/>
+              <a:srgbClr val="111A24"/>
             </a:solidFill>
           </a:ln>
           <a:effectLst/>
@@ -6426,9 +6426,9 @@
           <a:prstGeom prst="line">
             <a:avLst/>
           </a:prstGeom>
-          <a:ln w="7937">
+          <a:ln w="18216">
             <a:solidFill>
-              <a:srgbClr val="1F2937"/>
+              <a:srgbClr val="111A24"/>
             </a:solidFill>
           </a:ln>
           <a:effectLst/>
@@ -6462,9 +6462,9 @@
           <a:prstGeom prst="line">
             <a:avLst/>
           </a:prstGeom>
-          <a:ln w="7937">
+          <a:ln w="18216">
             <a:solidFill>
-              <a:srgbClr val="1F2937"/>
+              <a:srgbClr val="111A24"/>
             </a:solidFill>
           </a:ln>
           <a:effectLst/>
@@ -6498,9 +6498,9 @@
           <a:prstGeom prst="line">
             <a:avLst/>
           </a:prstGeom>
-          <a:ln w="7937">
+          <a:ln w="18216">
             <a:solidFill>
-              <a:srgbClr val="1F2937"/>
+              <a:srgbClr val="111A24"/>
             </a:solidFill>
           </a:ln>
           <a:effectLst/>
@@ -6593,11 +6593,11 @@
             </a:avLst>
           </a:prstGeom>
           <a:solidFill>
-            <a:srgbClr val="F7F9FB"/>
+            <a:srgbClr val="F4F7FA"/>
           </a:solidFill>
-          <a:ln w="9524">
+          <a:ln w="12699">
             <a:solidFill>
-              <a:srgbClr val="CBD3DA"/>
+              <a:srgbClr val="AEBBC7"/>
             </a:solidFill>
           </a:ln>
           <a:effectLst/>
@@ -6657,9 +6657,9 @@
               <a:spcAft>
                 <a:spcPts val="0"/>
               </a:spcAft>
-              <a:defRPr sz="1187" b="0" i="0" lang="zh-CN" dirty="0">
+              <a:defRPr sz="1187" b="1" i="0" lang="zh-CN" dirty="0">
                 <a:solidFill>
-                  <a:srgbClr val="3F4854"/>
+                  <a:srgbClr val="27303A"/>
                 </a:solidFill>
                 <a:latin typeface="DejaVu Sans"/>
                 <a:ea typeface="DejaVu Sans"/>
@@ -6667,9 +6667,9 @@
               </a:defRPr>
             </a:pPr>
             <a:r>
-              <a:rPr sz="1187" b="0" i="0" lang="zh-CN" dirty="0">
+              <a:rPr sz="1187" b="1" i="0" lang="zh-CN" dirty="0">
                 <a:solidFill>
-                  <a:srgbClr val="3F4854"/>
+                  <a:srgbClr val="27303A"/>
                 </a:solidFill>
                 <a:latin typeface="DejaVu Sans"/>
                 <a:ea typeface="DejaVu Sans"/>
@@ -6697,11 +6697,11 @@
             </a:avLst>
           </a:prstGeom>
           <a:solidFill>
-            <a:srgbClr val="F7F9FB"/>
+            <a:srgbClr val="F4F7FA"/>
           </a:solidFill>
-          <a:ln w="9524">
+          <a:ln w="12699">
             <a:solidFill>
-              <a:srgbClr val="CBD3DA"/>
+              <a:srgbClr val="AEBBC7"/>
             </a:solidFill>
           </a:ln>
           <a:effectLst/>
@@ -6753,7 +6753,7 @@
           <a:p>
             <a:pPr algn="ctr" fontAlgn="base">
               <a:lnSpc>
-                <a:spcPts val="1390"/>
+                <a:spcPts val="1374"/>
               </a:lnSpc>
               <a:spcBef>
                 <a:spcPts val="0"/>
@@ -6761,9 +6761,9 @@
               <a:spcAft>
                 <a:spcPts val="0"/>
               </a:spcAft>
-              <a:defRPr sz="1187" b="0" i="0" lang="zh-CN" dirty="0">
+              <a:defRPr sz="1164" b="1" i="0" lang="zh-CN" dirty="0">
                 <a:solidFill>
-                  <a:srgbClr val="3F4854"/>
+                  <a:srgbClr val="27303A"/>
                 </a:solidFill>
                 <a:latin typeface="DejaVu Sans"/>
                 <a:ea typeface="DejaVu Sans"/>
@@ -6771,9 +6771,9 @@
               </a:defRPr>
             </a:pPr>
             <a:r>
-              <a:rPr sz="1187" b="0" i="0" lang="zh-CN" dirty="0">
+              <a:rPr sz="1164" b="1" i="0" lang="zh-CN" dirty="0">
                 <a:solidFill>
-                  <a:srgbClr val="3F4854"/>
+                  <a:srgbClr val="27303A"/>
                 </a:solidFill>
                 <a:latin typeface="DejaVu Sans"/>
                 <a:ea typeface="DejaVu Sans"/>
@@ -6804,10 +6804,10 @@
             <a:pathLst>
               <a:path w="10000" h="4950">
                 <a:moveTo>
-                  <a:pt x="0" y="1675"/>
+                  <a:pt x="0" y="1375"/>
                 </a:moveTo>
                 <a:lnTo>
-                  <a:pt x="4500" y="1675"/>
+                  <a:pt x="4500" y="1375"/>
                 </a:lnTo>
                 <a:lnTo>
                   <a:pt x="4500" y="0"/>
@@ -6819,17 +6819,17 @@
                   <a:pt x="4500" y="4950"/>
                 </a:lnTo>
                 <a:lnTo>
-                  <a:pt x="4500" y="3275"/>
+                  <a:pt x="4500" y="3575"/>
                 </a:lnTo>
                 <a:lnTo>
-                  <a:pt x="0" y="3275"/>
+                  <a:pt x="0" y="3575"/>
                 </a:lnTo>
                 <a:close/>
               </a:path>
             </a:pathLst>
           </a:custGeom>
           <a:solidFill>
-            <a:srgbClr val="4B5563"/>
+            <a:srgbClr val="3C4753"/>
           </a:solidFill>
           <a:ln>
             <a:noFill/>
@@ -6875,11 +6875,11 @@
             </a:avLst>
           </a:prstGeom>
           <a:solidFill>
-            <a:srgbClr val="F7F9FB"/>
+            <a:srgbClr val="F4F7FA"/>
           </a:solidFill>
-          <a:ln w="9524">
+          <a:ln w="12699">
             <a:solidFill>
-              <a:srgbClr val="CBD3DA"/>
+              <a:srgbClr val="AEBBC7"/>
             </a:solidFill>
           </a:ln>
           <a:effectLst/>
@@ -6939,9 +6939,9 @@
               <a:spcAft>
                 <a:spcPts val="0"/>
               </a:spcAft>
-              <a:defRPr sz="1187" b="0" i="0" lang="zh-CN" dirty="0">
+              <a:defRPr sz="1187" b="1" i="0" lang="zh-CN" dirty="0">
                 <a:solidFill>
-                  <a:srgbClr val="3F4854"/>
+                  <a:srgbClr val="27303A"/>
                 </a:solidFill>
                 <a:latin typeface="DejaVu Sans"/>
                 <a:ea typeface="DejaVu Sans"/>
@@ -6949,9 +6949,9 @@
               </a:defRPr>
             </a:pPr>
             <a:r>
-              <a:rPr sz="1187" b="0" i="0" lang="zh-CN" dirty="0">
+              <a:rPr sz="1187" b="1" i="0" lang="zh-CN" dirty="0">
                 <a:solidFill>
-                  <a:srgbClr val="3F4854"/>
+                  <a:srgbClr val="27303A"/>
                 </a:solidFill>
                 <a:latin typeface="DejaVu Sans"/>
                 <a:ea typeface="DejaVu Sans"/>
@@ -6982,10 +6982,10 @@
             <a:pathLst>
               <a:path w="10000" h="4950">
                 <a:moveTo>
-                  <a:pt x="0" y="1675"/>
+                  <a:pt x="0" y="1375"/>
                 </a:moveTo>
                 <a:lnTo>
-                  <a:pt x="4500" y="1675"/>
+                  <a:pt x="4500" y="1375"/>
                 </a:lnTo>
                 <a:lnTo>
                   <a:pt x="4500" y="0"/>
@@ -6997,17 +6997,17 @@
                   <a:pt x="4500" y="4950"/>
                 </a:lnTo>
                 <a:lnTo>
-                  <a:pt x="4500" y="3275"/>
+                  <a:pt x="4500" y="3575"/>
                 </a:lnTo>
                 <a:lnTo>
-                  <a:pt x="0" y="3275"/>
+                  <a:pt x="0" y="3575"/>
                 </a:lnTo>
                 <a:close/>
               </a:path>
             </a:pathLst>
           </a:custGeom>
           <a:solidFill>
-            <a:srgbClr val="4B5563"/>
+            <a:srgbClr val="3C4753"/>
           </a:solidFill>
           <a:ln>
             <a:noFill/>
@@ -7055,7 +7055,7 @@
           <a:solidFill>
             <a:srgbClr val="E6F2F3"/>
           </a:solidFill>
-          <a:ln w="9524">
+          <a:ln w="12699">
             <a:solidFill>
               <a:srgbClr val="1F7F8C"/>
             </a:solidFill>
@@ -7159,7 +7159,7 @@
           <a:solidFill>
             <a:srgbClr val="FFFFFF"/>
           </a:solidFill>
-          <a:ln w="11112">
+          <a:ln w="15081">
             <a:solidFill>
               <a:srgbClr val="1F7F8C"/>
             </a:solidFill>
@@ -7248,9 +7248,9 @@
           <a:prstGeom prst="line">
             <a:avLst/>
           </a:prstGeom>
-          <a:ln w="7937">
+          <a:ln w="18216">
             <a:solidFill>
-              <a:srgbClr val="1F2937"/>
+              <a:srgbClr val="111A24"/>
             </a:solidFill>
           </a:ln>
           <a:effectLst/>
@@ -7284,9 +7284,9 @@
           <a:prstGeom prst="line">
             <a:avLst/>
           </a:prstGeom>
-          <a:ln w="7937">
+          <a:ln w="18216">
             <a:solidFill>
-              <a:srgbClr val="1F2937"/>
+              <a:srgbClr val="111A24"/>
             </a:solidFill>
           </a:ln>
           <a:effectLst/>
@@ -7320,9 +7320,9 @@
           <a:prstGeom prst="line">
             <a:avLst/>
           </a:prstGeom>
-          <a:ln w="7937">
+          <a:ln w="18216">
             <a:solidFill>
-              <a:srgbClr val="1F2937"/>
+              <a:srgbClr val="111A24"/>
             </a:solidFill>
           </a:ln>
           <a:effectLst/>
@@ -7356,9 +7356,9 @@
           <a:prstGeom prst="line">
             <a:avLst/>
           </a:prstGeom>
-          <a:ln w="7937">
+          <a:ln w="18216">
             <a:solidFill>
-              <a:srgbClr val="1F2937"/>
+              <a:srgbClr val="111A24"/>
             </a:solidFill>
           </a:ln>
           <a:effectLst/>
@@ -7392,9 +7392,9 @@
           <a:prstGeom prst="line">
             <a:avLst/>
           </a:prstGeom>
-          <a:ln w="7937">
+          <a:ln w="18216">
             <a:solidFill>
-              <a:srgbClr val="1F2937"/>
+              <a:srgbClr val="111A24"/>
             </a:solidFill>
           </a:ln>
           <a:effectLst/>
@@ -7428,9 +7428,9 @@
           <a:prstGeom prst="line">
             <a:avLst/>
           </a:prstGeom>
-          <a:ln w="7937">
+          <a:ln w="18216">
             <a:solidFill>
-              <a:srgbClr val="1F2937"/>
+              <a:srgbClr val="111A24"/>
             </a:solidFill>
           </a:ln>
           <a:effectLst/>
@@ -7465,9 +7465,9 @@
             <a:avLst/>
           </a:prstGeom>
           <a:noFill/>
-          <a:ln w="7937">
+          <a:ln w="18216">
             <a:solidFill>
-              <a:srgbClr val="1F2937"/>
+              <a:srgbClr val="111A24"/>
             </a:solidFill>
           </a:ln>
           <a:effectLst/>
@@ -7509,9 +7509,9 @@
             <a:avLst/>
           </a:prstGeom>
           <a:noFill/>
-          <a:ln w="7937">
+          <a:ln w="18216">
             <a:solidFill>
-              <a:srgbClr val="1F2937"/>
+              <a:srgbClr val="111A24"/>
             </a:solidFill>
           </a:ln>
           <a:effectLst/>
@@ -7611,11 +7611,11 @@
             </a:avLst>
           </a:prstGeom>
           <a:solidFill>
-            <a:srgbClr val="F7F9FB"/>
+            <a:srgbClr val="F4F7FA"/>
           </a:solidFill>
-          <a:ln w="9524">
+          <a:ln w="12699">
             <a:solidFill>
-              <a:srgbClr val="CBD3DA"/>
+              <a:srgbClr val="AEBBC7"/>
             </a:solidFill>
           </a:ln>
           <a:effectLst/>
@@ -7675,9 +7675,9 @@
               <a:spcAft>
                 <a:spcPts val="0"/>
               </a:spcAft>
-              <a:defRPr sz="1187" b="0" i="0" lang="zh-CN" dirty="0">
+              <a:defRPr sz="1187" b="1" i="0" lang="zh-CN" dirty="0">
                 <a:solidFill>
-                  <a:srgbClr val="3F4854"/>
+                  <a:srgbClr val="27303A"/>
                 </a:solidFill>
                 <a:latin typeface="DejaVu Sans"/>
                 <a:ea typeface="DejaVu Sans"/>
@@ -7685,9 +7685,9 @@
               </a:defRPr>
             </a:pPr>
             <a:r>
-              <a:rPr sz="1187" b="0" i="0" lang="zh-CN" dirty="0">
+              <a:rPr sz="1187" b="1" i="0" lang="zh-CN" dirty="0">
                 <a:solidFill>
-                  <a:srgbClr val="3F4854"/>
+                  <a:srgbClr val="27303A"/>
                 </a:solidFill>
                 <a:latin typeface="DejaVu Sans"/>
                 <a:ea typeface="DejaVu Sans"/>
@@ -7715,11 +7715,11 @@
             </a:avLst>
           </a:prstGeom>
           <a:solidFill>
-            <a:srgbClr val="F7F9FB"/>
+            <a:srgbClr val="F4F7FA"/>
           </a:solidFill>
-          <a:ln w="9524">
+          <a:ln w="12699">
             <a:solidFill>
-              <a:srgbClr val="CBD3DA"/>
+              <a:srgbClr val="AEBBC7"/>
             </a:solidFill>
           </a:ln>
           <a:effectLst/>
@@ -7779,9 +7779,9 @@
               <a:spcAft>
                 <a:spcPts val="0"/>
               </a:spcAft>
-              <a:defRPr sz="1187" b="0" i="0" lang="zh-CN" dirty="0">
+              <a:defRPr sz="1187" b="1" i="0" lang="zh-CN" dirty="0">
                 <a:solidFill>
-                  <a:srgbClr val="3F4854"/>
+                  <a:srgbClr val="27303A"/>
                 </a:solidFill>
                 <a:latin typeface="DejaVu Sans"/>
                 <a:ea typeface="DejaVu Sans"/>
@@ -7789,9 +7789,9 @@
               </a:defRPr>
             </a:pPr>
             <a:r>
-              <a:rPr sz="1187" b="0" i="0" lang="zh-CN" dirty="0">
+              <a:rPr sz="1187" b="1" i="0" lang="zh-CN" dirty="0">
                 <a:solidFill>
-                  <a:srgbClr val="3F4854"/>
+                  <a:srgbClr val="27303A"/>
                 </a:solidFill>
                 <a:latin typeface="DejaVu Sans"/>
                 <a:ea typeface="DejaVu Sans"/>
@@ -7822,10 +7822,10 @@
             <a:pathLst>
               <a:path w="10000" h="4950">
                 <a:moveTo>
-                  <a:pt x="0" y="1675"/>
+                  <a:pt x="0" y="1375"/>
                 </a:moveTo>
                 <a:lnTo>
-                  <a:pt x="4500" y="1675"/>
+                  <a:pt x="4500" y="1375"/>
                 </a:lnTo>
                 <a:lnTo>
                   <a:pt x="4500" y="0"/>
@@ -7837,17 +7837,17 @@
                   <a:pt x="4500" y="4950"/>
                 </a:lnTo>
                 <a:lnTo>
-                  <a:pt x="4500" y="3275"/>
+                  <a:pt x="4500" y="3575"/>
                 </a:lnTo>
                 <a:lnTo>
-                  <a:pt x="0" y="3275"/>
+                  <a:pt x="0" y="3575"/>
                 </a:lnTo>
                 <a:close/>
               </a:path>
             </a:pathLst>
           </a:custGeom>
           <a:solidFill>
-            <a:srgbClr val="4B5563"/>
+            <a:srgbClr val="3C4753"/>
           </a:solidFill>
           <a:ln>
             <a:noFill/>
@@ -7893,11 +7893,11 @@
             </a:avLst>
           </a:prstGeom>
           <a:solidFill>
-            <a:srgbClr val="F7F9FB"/>
+            <a:srgbClr val="F4F7FA"/>
           </a:solidFill>
-          <a:ln w="9524">
+          <a:ln w="12699">
             <a:solidFill>
-              <a:srgbClr val="CBD3DA"/>
+              <a:srgbClr val="AEBBC7"/>
             </a:solidFill>
           </a:ln>
           <a:effectLst/>
@@ -7957,9 +7957,9 @@
               <a:spcAft>
                 <a:spcPts val="0"/>
               </a:spcAft>
-              <a:defRPr sz="1111" b="0" i="0" lang="zh-CN" dirty="0">
+              <a:defRPr sz="1111" b="1" i="0" lang="zh-CN" dirty="0">
                 <a:solidFill>
-                  <a:srgbClr val="3F4854"/>
+                  <a:srgbClr val="27303A"/>
                 </a:solidFill>
                 <a:latin typeface="DejaVu Sans"/>
                 <a:ea typeface="DejaVu Sans"/>
@@ -7967,9 +7967,9 @@
               </a:defRPr>
             </a:pPr>
             <a:r>
-              <a:rPr sz="1111" b="0" i="0" lang="zh-CN" dirty="0">
+              <a:rPr sz="1111" b="1" i="0" lang="zh-CN" dirty="0">
                 <a:solidFill>
-                  <a:srgbClr val="3F4854"/>
+                  <a:srgbClr val="27303A"/>
                 </a:solidFill>
                 <a:latin typeface="DejaVu Sans"/>
                 <a:ea typeface="DejaVu Sans"/>
@@ -7989,9 +7989,9 @@
               <a:spcAft>
                 <a:spcPts val="0"/>
               </a:spcAft>
-              <a:defRPr sz="1111" b="0" i="0" lang="zh-CN" dirty="0">
+              <a:defRPr sz="1111" b="1" i="0" lang="zh-CN" dirty="0">
                 <a:solidFill>
-                  <a:srgbClr val="3F4854"/>
+                  <a:srgbClr val="27303A"/>
                 </a:solidFill>
                 <a:latin typeface="DejaVu Sans"/>
                 <a:ea typeface="DejaVu Sans"/>
@@ -7999,9 +7999,9 @@
               </a:defRPr>
             </a:pPr>
             <a:r>
-              <a:rPr sz="1111" b="0" i="0" lang="zh-CN" dirty="0">
+              <a:rPr sz="1111" b="1" i="0" lang="zh-CN" dirty="0">
                 <a:solidFill>
-                  <a:srgbClr val="3F4854"/>
+                  <a:srgbClr val="27303A"/>
                 </a:solidFill>
                 <a:latin typeface="DejaVu Sans"/>
                 <a:ea typeface="DejaVu Sans"/>
@@ -8032,10 +8032,10 @@
             <a:pathLst>
               <a:path w="10000" h="4950">
                 <a:moveTo>
-                  <a:pt x="0" y="1675"/>
+                  <a:pt x="0" y="1375"/>
                 </a:moveTo>
                 <a:lnTo>
-                  <a:pt x="4500" y="1675"/>
+                  <a:pt x="4500" y="1375"/>
                 </a:lnTo>
                 <a:lnTo>
                   <a:pt x="4500" y="0"/>
@@ -8047,17 +8047,17 @@
                   <a:pt x="4500" y="4950"/>
                 </a:lnTo>
                 <a:lnTo>
-                  <a:pt x="4500" y="3275"/>
+                  <a:pt x="4500" y="3575"/>
                 </a:lnTo>
                 <a:lnTo>
-                  <a:pt x="0" y="3275"/>
+                  <a:pt x="0" y="3575"/>
                 </a:lnTo>
                 <a:close/>
               </a:path>
             </a:pathLst>
           </a:custGeom>
           <a:solidFill>
-            <a:srgbClr val="4B5563"/>
+            <a:srgbClr val="3C4753"/>
           </a:solidFill>
           <a:ln>
             <a:noFill/>
@@ -8105,7 +8105,7 @@
           <a:solidFill>
             <a:srgbClr val="E6F2F3"/>
           </a:solidFill>
-          <a:ln w="9524">
+          <a:ln w="12699">
             <a:solidFill>
               <a:srgbClr val="1F7F8C"/>
             </a:solidFill>
@@ -8241,7 +8241,7 @@
           <a:solidFill>
             <a:srgbClr val="FFFFFF"/>
           </a:solidFill>
-          <a:ln w="11112">
+          <a:ln w="15081">
             <a:solidFill>
               <a:srgbClr val="5B7592"/>
             </a:solidFill>
@@ -8330,9 +8330,9 @@
           <a:prstGeom prst="line">
             <a:avLst/>
           </a:prstGeom>
-          <a:ln w="7937">
+          <a:ln w="18216">
             <a:solidFill>
-              <a:srgbClr val="1F2937"/>
+              <a:srgbClr val="111A24"/>
             </a:solidFill>
           </a:ln>
           <a:effectLst/>
@@ -8366,9 +8366,9 @@
           <a:prstGeom prst="line">
             <a:avLst/>
           </a:prstGeom>
-          <a:ln w="7937">
+          <a:ln w="18216">
             <a:solidFill>
-              <a:srgbClr val="1F2937"/>
+              <a:srgbClr val="111A24"/>
             </a:solidFill>
           </a:ln>
           <a:effectLst/>
@@ -8402,9 +8402,9 @@
           <a:prstGeom prst="line">
             <a:avLst/>
           </a:prstGeom>
-          <a:ln w="7937">
+          <a:ln w="18216">
             <a:solidFill>
-              <a:srgbClr val="1F2937"/>
+              <a:srgbClr val="111A24"/>
             </a:solidFill>
           </a:ln>
           <a:effectLst/>
@@ -8438,9 +8438,9 @@
           <a:prstGeom prst="line">
             <a:avLst/>
           </a:prstGeom>
-          <a:ln w="7937">
+          <a:ln w="18216">
             <a:solidFill>
-              <a:srgbClr val="1F2937"/>
+              <a:srgbClr val="111A24"/>
             </a:solidFill>
           </a:ln>
           <a:effectLst/>
@@ -8474,9 +8474,9 @@
           <a:prstGeom prst="line">
             <a:avLst/>
           </a:prstGeom>
-          <a:ln w="7937">
+          <a:ln w="18216">
             <a:solidFill>
-              <a:srgbClr val="1F2937"/>
+              <a:srgbClr val="111A24"/>
             </a:solidFill>
           </a:ln>
           <a:effectLst/>
@@ -8510,9 +8510,9 @@
           <a:prstGeom prst="line">
             <a:avLst/>
           </a:prstGeom>
-          <a:ln w="7937">
+          <a:ln w="18216">
             <a:solidFill>
-              <a:srgbClr val="1F2937"/>
+              <a:srgbClr val="111A24"/>
             </a:solidFill>
           </a:ln>
           <a:effectLst/>
@@ -8546,9 +8546,9 @@
           <a:prstGeom prst="line">
             <a:avLst/>
           </a:prstGeom>
-          <a:ln w="7937">
+          <a:ln w="18216">
             <a:solidFill>
-              <a:srgbClr val="1F2937"/>
+              <a:srgbClr val="111A24"/>
             </a:solidFill>
           </a:ln>
           <a:effectLst/>
@@ -8582,9 +8582,9 @@
           <a:prstGeom prst="line">
             <a:avLst/>
           </a:prstGeom>
-          <a:ln w="7937">
+          <a:ln w="18216">
             <a:solidFill>
-              <a:srgbClr val="1F2937"/>
+              <a:srgbClr val="111A24"/>
             </a:solidFill>
           </a:ln>
           <a:effectLst/>
@@ -8618,9 +8618,9 @@
           <a:prstGeom prst="line">
             <a:avLst/>
           </a:prstGeom>
-          <a:ln w="7937">
+          <a:ln w="18216">
             <a:solidFill>
-              <a:srgbClr val="1F2937"/>
+              <a:srgbClr val="111A24"/>
             </a:solidFill>
           </a:ln>
           <a:effectLst/>
@@ -8654,9 +8654,9 @@
           <a:prstGeom prst="line">
             <a:avLst/>
           </a:prstGeom>
-          <a:ln w="7937">
+          <a:ln w="18216">
             <a:solidFill>
-              <a:srgbClr val="1F2937"/>
+              <a:srgbClr val="111A24"/>
             </a:solidFill>
           </a:ln>
           <a:effectLst/>
@@ -8690,9 +8690,9 @@
           <a:prstGeom prst="line">
             <a:avLst/>
           </a:prstGeom>
-          <a:ln w="7937">
+          <a:ln w="18216">
             <a:solidFill>
-              <a:srgbClr val="1F2937"/>
+              <a:srgbClr val="111A24"/>
             </a:solidFill>
           </a:ln>
           <a:effectLst/>
@@ -8726,9 +8726,9 @@
           <a:prstGeom prst="line">
             <a:avLst/>
           </a:prstGeom>
-          <a:ln w="7937">
+          <a:ln w="18216">
             <a:solidFill>
-              <a:srgbClr val="1F2937"/>
+              <a:srgbClr val="111A24"/>
             </a:solidFill>
           </a:ln>
           <a:effectLst/>
@@ -8821,11 +8821,11 @@
             </a:avLst>
           </a:prstGeom>
           <a:solidFill>
-            <a:srgbClr val="F7F9FB"/>
+            <a:srgbClr val="F4F7FA"/>
           </a:solidFill>
-          <a:ln w="9524">
+          <a:ln w="12699">
             <a:solidFill>
-              <a:srgbClr val="CBD3DA"/>
+              <a:srgbClr val="AEBBC7"/>
             </a:solidFill>
           </a:ln>
           <a:effectLst/>
@@ -8877,7 +8877,7 @@
           <a:p>
             <a:pPr algn="ctr" fontAlgn="base">
               <a:lnSpc>
-                <a:spcPts val="1312"/>
+                <a:spcPts val="1265"/>
               </a:lnSpc>
               <a:spcBef>
                 <a:spcPts val="0"/>
@@ -8885,9 +8885,9 @@
               <a:spcAft>
                 <a:spcPts val="0"/>
               </a:spcAft>
-              <a:defRPr sz="1124" b="0" i="0" lang="zh-CN" dirty="0">
+              <a:defRPr sz="1069" b="1" i="0" lang="zh-CN" dirty="0">
                 <a:solidFill>
-                  <a:srgbClr val="3F4854"/>
+                  <a:srgbClr val="27303A"/>
                 </a:solidFill>
                 <a:latin typeface="DejaVu Sans"/>
                 <a:ea typeface="DejaVu Sans"/>
@@ -8895,9 +8895,9 @@
               </a:defRPr>
             </a:pPr>
             <a:r>
-              <a:rPr sz="1124" b="0" i="0" lang="zh-CN" dirty="0">
+              <a:rPr sz="1069" b="1" i="0" lang="zh-CN" dirty="0">
                 <a:solidFill>
-                  <a:srgbClr val="3F4854"/>
+                  <a:srgbClr val="27303A"/>
                 </a:solidFill>
                 <a:latin typeface="DejaVu Sans"/>
                 <a:ea typeface="DejaVu Sans"/>
@@ -8925,11 +8925,11 @@
             </a:avLst>
           </a:prstGeom>
           <a:solidFill>
-            <a:srgbClr val="F7F9FB"/>
+            <a:srgbClr val="F4F7FA"/>
           </a:solidFill>
-          <a:ln w="9524">
+          <a:ln w="12699">
             <a:solidFill>
-              <a:srgbClr val="CBD3DA"/>
+              <a:srgbClr val="AEBBC7"/>
             </a:solidFill>
           </a:ln>
           <a:effectLst/>
@@ -8981,7 +8981,7 @@
           <a:p>
             <a:pPr algn="ctr" fontAlgn="base">
               <a:lnSpc>
-                <a:spcPts val="1312"/>
+                <a:spcPts val="1265"/>
               </a:lnSpc>
               <a:spcBef>
                 <a:spcPts val="0"/>
@@ -8989,9 +8989,9 @@
               <a:spcAft>
                 <a:spcPts val="0"/>
               </a:spcAft>
-              <a:defRPr sz="1124" b="0" i="0" lang="zh-CN" dirty="0">
+              <a:defRPr sz="1069" b="1" i="0" lang="zh-CN" dirty="0">
                 <a:solidFill>
-                  <a:srgbClr val="3F4854"/>
+                  <a:srgbClr val="27303A"/>
                 </a:solidFill>
                 <a:latin typeface="DejaVu Sans"/>
                 <a:ea typeface="DejaVu Sans"/>
@@ -8999,9 +8999,9 @@
               </a:defRPr>
             </a:pPr>
             <a:r>
-              <a:rPr sz="1124" b="0" i="0" lang="zh-CN" dirty="0">
+              <a:rPr sz="1069" b="1" i="0" lang="zh-CN" dirty="0">
                 <a:solidFill>
-                  <a:srgbClr val="3F4854"/>
+                  <a:srgbClr val="27303A"/>
                 </a:solidFill>
                 <a:latin typeface="DejaVu Sans"/>
                 <a:ea typeface="DejaVu Sans"/>
@@ -9029,11 +9029,11 @@
             </a:avLst>
           </a:prstGeom>
           <a:solidFill>
-            <a:srgbClr val="F7F9FB"/>
+            <a:srgbClr val="F4F7FA"/>
           </a:solidFill>
-          <a:ln w="9524">
+          <a:ln w="12699">
             <a:solidFill>
-              <a:srgbClr val="CBD3DA"/>
+              <a:srgbClr val="AEBBC7"/>
             </a:solidFill>
           </a:ln>
           <a:effectLst/>
@@ -9085,7 +9085,7 @@
           <a:p>
             <a:pPr algn="ctr" fontAlgn="base">
               <a:lnSpc>
-                <a:spcPts val="1312"/>
+                <a:spcPts val="1265"/>
               </a:lnSpc>
               <a:spcBef>
                 <a:spcPts val="0"/>
@@ -9093,9 +9093,9 @@
               <a:spcAft>
                 <a:spcPts val="0"/>
               </a:spcAft>
-              <a:defRPr sz="1124" b="0" i="0" lang="zh-CN" dirty="0">
+              <a:defRPr sz="1069" b="1" i="0" lang="zh-CN" dirty="0">
                 <a:solidFill>
-                  <a:srgbClr val="3F4854"/>
+                  <a:srgbClr val="27303A"/>
                 </a:solidFill>
                 <a:latin typeface="DejaVu Sans"/>
                 <a:ea typeface="DejaVu Sans"/>
@@ -9103,9 +9103,9 @@
               </a:defRPr>
             </a:pPr>
             <a:r>
-              <a:rPr sz="1124" b="0" i="0" lang="zh-CN" dirty="0">
+              <a:rPr sz="1069" b="1" i="0" lang="zh-CN" dirty="0">
                 <a:solidFill>
-                  <a:srgbClr val="3F4854"/>
+                  <a:srgbClr val="27303A"/>
                 </a:solidFill>
                 <a:latin typeface="DejaVu Sans"/>
                 <a:ea typeface="DejaVu Sans"/>
@@ -9133,11 +9133,11 @@
             </a:avLst>
           </a:prstGeom>
           <a:solidFill>
-            <a:srgbClr val="F7F9FB"/>
+            <a:srgbClr val="F4F7FA"/>
           </a:solidFill>
-          <a:ln w="9524">
+          <a:ln w="12699">
             <a:solidFill>
-              <a:srgbClr val="CBD3DA"/>
+              <a:srgbClr val="AEBBC7"/>
             </a:solidFill>
           </a:ln>
           <a:effectLst/>
@@ -9189,7 +9189,7 @@
           <a:p>
             <a:pPr algn="ctr" fontAlgn="base">
               <a:lnSpc>
-                <a:spcPts val="1156"/>
+                <a:spcPts val="1031"/>
               </a:lnSpc>
               <a:spcBef>
                 <a:spcPts val="0"/>
@@ -9197,9 +9197,9 @@
               <a:spcAft>
                 <a:spcPts val="0"/>
               </a:spcAft>
-              <a:defRPr sz="976" b="0" i="0" lang="zh-CN" dirty="0">
+              <a:defRPr sz="873" b="1" i="0" lang="zh-CN" dirty="0">
                 <a:solidFill>
-                  <a:srgbClr val="3F4854"/>
+                  <a:srgbClr val="27303A"/>
                 </a:solidFill>
                 <a:latin typeface="DejaVu Sans"/>
                 <a:ea typeface="DejaVu Sans"/>
@@ -9207,9 +9207,9 @@
               </a:defRPr>
             </a:pPr>
             <a:r>
-              <a:rPr sz="976" b="0" i="0" lang="zh-CN" dirty="0">
+              <a:rPr sz="873" b="1" i="0" lang="zh-CN" dirty="0">
                 <a:solidFill>
-                  <a:srgbClr val="3F4854"/>
+                  <a:srgbClr val="27303A"/>
                 </a:solidFill>
                 <a:latin typeface="DejaVu Sans"/>
                 <a:ea typeface="DejaVu Sans"/>
@@ -9239,7 +9239,7 @@
           <a:solidFill>
             <a:srgbClr val="FFFFFF"/>
           </a:solidFill>
-          <a:ln w="11112">
+          <a:ln w="15081">
             <a:solidFill>
               <a:srgbClr val="C48A24"/>
             </a:solidFill>
@@ -9347,7 +9347,7 @@
               <a:spcAft>
                 <a:spcPts val="0"/>
               </a:spcAft>
-              <a:defRPr sz="1299" b="0" i="0" lang="zh-CN" dirty="0">
+              <a:defRPr sz="1312" b="1" i="0" lang="zh-CN" dirty="0">
                 <a:solidFill>
                   <a:srgbClr val="7A5410"/>
                 </a:solidFill>
@@ -9357,7 +9357,7 @@
               </a:defRPr>
             </a:pPr>
             <a:r>
-              <a:rPr sz="1299" b="0" i="0" lang="zh-CN" dirty="0">
+              <a:rPr sz="1312" b="1" i="0" lang="zh-CN" dirty="0">
                 <a:solidFill>
                   <a:srgbClr val="7A5410"/>
                 </a:solidFill>
@@ -9365,7 +9365,7 @@
                 <a:ea typeface="DejaVu Sans"/>
                 <a:cs typeface="DejaVu Sans"/>
               </a:rPr>
-              <a:t>Does Zn enter and couple with oxygen </a:t>
+              <a:t>Does Zn enter and couple with </a:t>
             </a:r>
           </a:p>
           <a:p>
@@ -9379,7 +9379,7 @@
               <a:spcAft>
                 <a:spcPts val="0"/>
               </a:spcAft>
-              <a:defRPr sz="1299" b="0" i="0" lang="zh-CN" dirty="0">
+              <a:defRPr sz="1312" b="1" i="0" lang="zh-CN" dirty="0">
                 <a:solidFill>
                   <a:srgbClr val="7A5410"/>
                 </a:solidFill>
@@ -9389,7 +9389,7 @@
               </a:defRPr>
             </a:pPr>
             <a:r>
-              <a:rPr sz="1299" b="0" i="0" lang="zh-CN" dirty="0">
+              <a:rPr sz="1312" b="1" i="0" lang="zh-CN" dirty="0">
                 <a:solidFill>
                   <a:srgbClr val="7A5410"/>
                 </a:solidFill>
@@ -9397,7 +9397,7 @@
                 <a:ea typeface="DejaVu Sans"/>
                 <a:cs typeface="DejaVu Sans"/>
               </a:rPr>
-              <a:t>stoichiometry?</a:t>
+              <a:t>oxygen stoichiometry?</a:t>
             </a:r>
           </a:p>
         </p:txBody>
@@ -9421,7 +9421,7 @@
           <a:solidFill>
             <a:srgbClr val="FFFFFF"/>
           </a:solidFill>
-          <a:ln w="11112">
+          <a:ln w="15081">
             <a:solidFill>
               <a:srgbClr val="C48A24"/>
             </a:solidFill>
@@ -9529,7 +9529,7 @@
               <a:spcAft>
                 <a:spcPts val="0"/>
               </a:spcAft>
-              <a:defRPr sz="1312" b="0" i="0" lang="zh-CN" dirty="0">
+              <a:defRPr sz="1312" b="1" i="0" lang="zh-CN" dirty="0">
                 <a:solidFill>
                   <a:srgbClr val="7A5410"/>
                 </a:solidFill>
@@ -9539,7 +9539,7 @@
               </a:defRPr>
             </a:pPr>
             <a:r>
-              <a:rPr sz="1312" b="0" i="0" lang="zh-CN" dirty="0">
+              <a:rPr sz="1312" b="1" i="0" lang="zh-CN" dirty="0">
                 <a:solidFill>
                   <a:srgbClr val="7A5410"/>
                 </a:solidFill>
@@ -9561,7 +9561,7 @@
               <a:spcAft>
                 <a:spcPts val="0"/>
               </a:spcAft>
-              <a:defRPr sz="1312" b="0" i="0" lang="zh-CN" dirty="0">
+              <a:defRPr sz="1312" b="1" i="0" lang="zh-CN" dirty="0">
                 <a:solidFill>
                   <a:srgbClr val="7A5410"/>
                 </a:solidFill>
@@ -9571,7 +9571,7 @@
               </a:defRPr>
             </a:pPr>
             <a:r>
-              <a:rPr sz="1312" b="0" i="0" lang="zh-CN" dirty="0">
+              <a:rPr sz="1312" b="1" i="0" lang="zh-CN" dirty="0">
                 <a:solidFill>
                   <a:srgbClr val="7A5410"/>
                 </a:solidFill>
@@ -9603,7 +9603,7 @@
           <a:solidFill>
             <a:srgbClr val="FFFFFF"/>
           </a:solidFill>
-          <a:ln w="11112">
+          <a:ln w="15081">
             <a:solidFill>
               <a:srgbClr val="C48A24"/>
             </a:solidFill>
@@ -9711,7 +9711,7 @@
               <a:spcAft>
                 <a:spcPts val="0"/>
               </a:spcAft>
-              <a:defRPr sz="1312" b="0" i="0" lang="zh-CN" dirty="0">
+              <a:defRPr sz="1312" b="1" i="0" lang="zh-CN" dirty="0">
                 <a:solidFill>
                   <a:srgbClr val="7A5410"/>
                 </a:solidFill>
@@ -9721,7 +9721,7 @@
               </a:defRPr>
             </a:pPr>
             <a:r>
-              <a:rPr sz="1312" b="0" i="0" lang="zh-CN" dirty="0">
+              <a:rPr sz="1312" b="1" i="0" lang="zh-CN" dirty="0">
                 <a:solidFill>
                   <a:srgbClr val="7A5410"/>
                 </a:solidFill>
@@ -9743,7 +9743,7 @@
               <a:spcAft>
                 <a:spcPts val="0"/>
               </a:spcAft>
-              <a:defRPr sz="1312" b="0" i="0" lang="zh-CN" dirty="0">
+              <a:defRPr sz="1312" b="1" i="0" lang="zh-CN" dirty="0">
                 <a:solidFill>
                   <a:srgbClr val="7A5410"/>
                 </a:solidFill>
@@ -9753,7 +9753,7 @@
               </a:defRPr>
             </a:pPr>
             <a:r>
-              <a:rPr sz="1312" b="0" i="0" lang="zh-CN" dirty="0">
+              <a:rPr sz="1312" b="1" i="0" lang="zh-CN" dirty="0">
                 <a:solidFill>
                   <a:srgbClr val="7A5410"/>
                 </a:solidFill>
@@ -9774,8 +9774,8 @@
         </p:nvSpPr>
         <p:spPr>
           <a:xfrm>
-            <a:off x="4079875" y="1730375"/>
-            <a:ext cx="333375" cy="79375"/>
+            <a:off x="4079875" y="1722437"/>
+            <a:ext cx="333375" cy="95250"/>
           </a:xfrm>
           <a:custGeom>
             <a:avLst/>
@@ -9784,34 +9784,34 @@
             <a:cxnLst/>
             <a:rect l="l" t="t" r="r" b="b"/>
             <a:pathLst>
-              <a:path w="42000" h="10000">
+              <a:path w="42000" h="12000">
                 <a:moveTo>
-                  <a:pt x="0" y="4100"/>
+                  <a:pt x="0" y="4750"/>
                 </a:moveTo>
                 <a:lnTo>
-                  <a:pt x="30000" y="4100"/>
+                  <a:pt x="27000" y="4750"/>
                 </a:lnTo>
                 <a:lnTo>
-                  <a:pt x="30000" y="0"/>
+                  <a:pt x="27000" y="0"/>
                 </a:lnTo>
                 <a:lnTo>
-                  <a:pt x="42000" y="5000"/>
+                  <a:pt x="42000" y="6000"/>
                 </a:lnTo>
                 <a:lnTo>
-                  <a:pt x="30000" y="10000"/>
+                  <a:pt x="27000" y="12000"/>
                 </a:lnTo>
                 <a:lnTo>
-                  <a:pt x="30000" y="5900"/>
+                  <a:pt x="27000" y="7250"/>
                 </a:lnTo>
                 <a:lnTo>
-                  <a:pt x="0" y="5900"/>
+                  <a:pt x="0" y="7250"/>
                 </a:lnTo>
                 <a:close/>
               </a:path>
             </a:pathLst>
           </a:custGeom>
           <a:solidFill>
-            <a:srgbClr val="4B5563"/>
+            <a:srgbClr val="3C4753"/>
           </a:solidFill>
           <a:ln>
             <a:noFill/>
@@ -9848,8 +9848,8 @@
         </p:nvSpPr>
         <p:spPr>
           <a:xfrm>
-            <a:off x="8048625" y="1730375"/>
-            <a:ext cx="333375" cy="79375"/>
+            <a:off x="8048625" y="1722437"/>
+            <a:ext cx="333375" cy="95250"/>
           </a:xfrm>
           <a:custGeom>
             <a:avLst/>
@@ -9858,34 +9858,34 @@
             <a:cxnLst/>
             <a:rect l="l" t="t" r="r" b="b"/>
             <a:pathLst>
-              <a:path w="42000" h="10000">
+              <a:path w="42000" h="12000">
                 <a:moveTo>
-                  <a:pt x="0" y="4100"/>
+                  <a:pt x="0" y="4750"/>
                 </a:moveTo>
                 <a:lnTo>
-                  <a:pt x="30000" y="4100"/>
+                  <a:pt x="27000" y="4750"/>
                 </a:lnTo>
                 <a:lnTo>
-                  <a:pt x="30000" y="0"/>
+                  <a:pt x="27000" y="0"/>
                 </a:lnTo>
                 <a:lnTo>
-                  <a:pt x="42000" y="5000"/>
+                  <a:pt x="42000" y="6000"/>
                 </a:lnTo>
                 <a:lnTo>
-                  <a:pt x="30000" y="10000"/>
+                  <a:pt x="27000" y="12000"/>
                 </a:lnTo>
                 <a:lnTo>
-                  <a:pt x="30000" y="5900"/>
+                  <a:pt x="27000" y="7250"/>
                 </a:lnTo>
                 <a:lnTo>
-                  <a:pt x="0" y="5900"/>
+                  <a:pt x="0" y="7250"/>
                 </a:lnTo>
                 <a:close/>
               </a:path>
             </a:pathLst>
           </a:custGeom>
           <a:solidFill>
-            <a:srgbClr val="4B5563"/>
+            <a:srgbClr val="3C4753"/>
           </a:solidFill>
           <a:ln>
             <a:noFill/>
@@ -9928,9 +9928,9 @@
           <a:prstGeom prst="line">
             <a:avLst/>
           </a:prstGeom>
-          <a:ln w="14287">
+          <a:ln w="19843">
             <a:solidFill>
-              <a:srgbClr val="4B5563"/>
+              <a:srgbClr val="3C4753"/>
             </a:solidFill>
           </a:ln>
           <a:effectLst/>
@@ -9964,9 +9964,9 @@
           <a:prstGeom prst="line">
             <a:avLst/>
           </a:prstGeom>
-          <a:ln w="14287">
+          <a:ln w="19843">
             <a:solidFill>
-              <a:srgbClr val="4B5563"/>
+              <a:srgbClr val="3C4753"/>
             </a:solidFill>
           </a:ln>
           <a:effectLst/>
@@ -9994,8 +9994,8 @@
         </p:nvSpPr>
         <p:spPr>
           <a:xfrm>
-            <a:off x="2897187" y="3524250"/>
-            <a:ext cx="79375" cy="254000"/>
+            <a:off x="2889250" y="3524250"/>
+            <a:ext cx="95250" cy="254000"/>
           </a:xfrm>
           <a:custGeom>
             <a:avLst/>
@@ -10004,34 +10004,34 @@
             <a:cxnLst/>
             <a:rect l="l" t="t" r="r" b="b"/>
             <a:pathLst>
-              <a:path w="10000" h="32000">
+              <a:path w="12000" h="32000">
                 <a:moveTo>
-                  <a:pt x="5900" y="0"/>
+                  <a:pt x="7250" y="0"/>
                 </a:moveTo>
                 <a:lnTo>
-                  <a:pt x="5900" y="20000"/>
+                  <a:pt x="7250" y="17000"/>
                 </a:lnTo>
                 <a:lnTo>
-                  <a:pt x="10000" y="20000"/>
+                  <a:pt x="12000" y="17000"/>
                 </a:lnTo>
                 <a:lnTo>
-                  <a:pt x="5000" y="32000"/>
+                  <a:pt x="6000" y="32000"/>
                 </a:lnTo>
                 <a:lnTo>
-                  <a:pt x="0" y="20000"/>
+                  <a:pt x="0" y="17000"/>
                 </a:lnTo>
                 <a:lnTo>
-                  <a:pt x="4100" y="20000"/>
+                  <a:pt x="4750" y="17000"/>
                 </a:lnTo>
                 <a:lnTo>
-                  <a:pt x="4100" y="0"/>
+                  <a:pt x="4750" y="0"/>
                 </a:lnTo>
                 <a:close/>
               </a:path>
             </a:pathLst>
           </a:custGeom>
           <a:solidFill>
-            <a:srgbClr val="4B5563"/>
+            <a:srgbClr val="3C4753"/>
           </a:solidFill>
           <a:ln>
             <a:noFill/>
@@ -10068,8 +10068,8 @@
         </p:nvSpPr>
         <p:spPr>
           <a:xfrm>
-            <a:off x="8929687" y="3524250"/>
-            <a:ext cx="79375" cy="254000"/>
+            <a:off x="8921750" y="3524250"/>
+            <a:ext cx="95250" cy="254000"/>
           </a:xfrm>
           <a:custGeom>
             <a:avLst/>
@@ -10078,34 +10078,34 @@
             <a:cxnLst/>
             <a:rect l="l" t="t" r="r" b="b"/>
             <a:pathLst>
-              <a:path w="10000" h="32000">
+              <a:path w="12000" h="32000">
                 <a:moveTo>
-                  <a:pt x="5900" y="0"/>
+                  <a:pt x="7250" y="0"/>
                 </a:moveTo>
                 <a:lnTo>
-                  <a:pt x="5900" y="20000"/>
+                  <a:pt x="7250" y="17000"/>
                 </a:lnTo>
                 <a:lnTo>
-                  <a:pt x="10000" y="20000"/>
+                  <a:pt x="12000" y="17000"/>
                 </a:lnTo>
                 <a:lnTo>
-                  <a:pt x="5000" y="32000"/>
+                  <a:pt x="6000" y="32000"/>
                 </a:lnTo>
                 <a:lnTo>
-                  <a:pt x="0" y="20000"/>
+                  <a:pt x="0" y="17000"/>
                 </a:lnTo>
                 <a:lnTo>
-                  <a:pt x="4100" y="20000"/>
+                  <a:pt x="4750" y="17000"/>
                 </a:lnTo>
                 <a:lnTo>
-                  <a:pt x="4100" y="0"/>
+                  <a:pt x="4750" y="0"/>
                 </a:lnTo>
                 <a:close/>
               </a:path>
             </a:pathLst>
           </a:custGeom>
           <a:solidFill>
-            <a:srgbClr val="4B5563"/>
+            <a:srgbClr val="3C4753"/>
           </a:solidFill>
           <a:ln>
             <a:noFill/>
@@ -10148,9 +10148,9 @@
           <a:prstGeom prst="line">
             <a:avLst/>
           </a:prstGeom>
-          <a:ln w="14287">
+          <a:ln w="19843">
             <a:solidFill>
-              <a:srgbClr val="4B5563"/>
+              <a:srgbClr val="3C4753"/>
             </a:solidFill>
           </a:ln>
           <a:effectLst/>
@@ -10184,9 +10184,9 @@
           <a:prstGeom prst="line">
             <a:avLst/>
           </a:prstGeom>
-          <a:ln w="14287">
+          <a:ln w="19843">
             <a:solidFill>
-              <a:srgbClr val="4B5563"/>
+              <a:srgbClr val="3C4753"/>
             </a:solidFill>
           </a:ln>
           <a:effectLst/>
@@ -10220,9 +10220,9 @@
           <a:prstGeom prst="line">
             <a:avLst/>
           </a:prstGeom>
-          <a:ln w="14287">
+          <a:ln w="19843">
             <a:solidFill>
-              <a:srgbClr val="4B5563"/>
+              <a:srgbClr val="3C4753"/>
             </a:solidFill>
           </a:ln>
           <a:effectLst/>
@@ -10250,8 +10250,8 @@
         </p:nvSpPr>
         <p:spPr>
           <a:xfrm>
-            <a:off x="6072187" y="5254625"/>
-            <a:ext cx="79375" cy="317500"/>
+            <a:off x="6064250" y="5254625"/>
+            <a:ext cx="95250" cy="317500"/>
           </a:xfrm>
           <a:custGeom>
             <a:avLst/>
@@ -10260,34 +10260,34 @@
             <a:cxnLst/>
             <a:rect l="l" t="t" r="r" b="b"/>
             <a:pathLst>
-              <a:path w="10000" h="40000">
+              <a:path w="12000" h="40000">
                 <a:moveTo>
-                  <a:pt x="5900" y="0"/>
+                  <a:pt x="7250" y="0"/>
                 </a:moveTo>
                 <a:lnTo>
-                  <a:pt x="5900" y="28000"/>
+                  <a:pt x="7250" y="25000"/>
                 </a:lnTo>
                 <a:lnTo>
-                  <a:pt x="10000" y="28000"/>
+                  <a:pt x="12000" y="25000"/>
                 </a:lnTo>
                 <a:lnTo>
-                  <a:pt x="5000" y="40000"/>
+                  <a:pt x="6000" y="40000"/>
                 </a:lnTo>
                 <a:lnTo>
-                  <a:pt x="0" y="28000"/>
+                  <a:pt x="0" y="25000"/>
                 </a:lnTo>
                 <a:lnTo>
-                  <a:pt x="4100" y="28000"/>
+                  <a:pt x="4750" y="25000"/>
                 </a:lnTo>
                 <a:lnTo>
-                  <a:pt x="4100" y="0"/>
+                  <a:pt x="4750" y="0"/>
                 </a:lnTo>
                 <a:close/>
               </a:path>
             </a:pathLst>
           </a:custGeom>
           <a:solidFill>
-            <a:srgbClr val="4B5563"/>
+            <a:srgbClr val="3C4753"/>
           </a:solidFill>
           <a:ln>
             <a:noFill/>
@@ -10330,12 +10330,12 @@
           <a:prstGeom prst="line">
             <a:avLst/>
           </a:prstGeom>
-          <a:ln w="14287">
+          <a:ln w="19843">
             <a:solidFill>
-              <a:srgbClr val="4B5563"/>
+              <a:srgbClr val="3C4753"/>
             </a:solidFill>
             <a:custDash>
-              <a:ds d="611111" sp="388889"/>
+              <a:ds d="440000" sp="280000"/>
             </a:custDash>
           </a:ln>
           <a:effectLst/>
@@ -10369,12 +10369,12 @@
           <a:prstGeom prst="line">
             <a:avLst/>
           </a:prstGeom>
-          <a:ln w="14287">
+          <a:ln w="19843">
             <a:solidFill>
-              <a:srgbClr val="4B5563"/>
+              <a:srgbClr val="3C4753"/>
             </a:solidFill>
             <a:custDash>
-              <a:ds d="611111" sp="388889"/>
+              <a:ds d="440000" sp="280000"/>
             </a:custDash>
           </a:ln>
           <a:effectLst/>
@@ -10408,12 +10408,12 @@
           <a:prstGeom prst="line">
             <a:avLst/>
           </a:prstGeom>
-          <a:ln w="14287">
+          <a:ln w="19843">
             <a:solidFill>
-              <a:srgbClr val="4B5563"/>
+              <a:srgbClr val="3C4753"/>
             </a:solidFill>
             <a:custDash>
-              <a:ds d="611111" sp="388889"/>
+              <a:ds d="440000" sp="280000"/>
             </a:custDash>
           </a:ln>
           <a:effectLst/>
@@ -10447,12 +10447,12 @@
           <a:prstGeom prst="line">
             <a:avLst/>
           </a:prstGeom>
-          <a:ln w="14287">
+          <a:ln w="19843">
             <a:solidFill>
-              <a:srgbClr val="4B5563"/>
+              <a:srgbClr val="3C4753"/>
             </a:solidFill>
             <a:custDash>
-              <a:ds d="611111" sp="388889"/>
+              <a:ds d="440000" sp="280000"/>
             </a:custDash>
             <a:tailEnd type="triangle"/>
           </a:ln>
@@ -10492,7 +10492,7 @@
           <a:solidFill>
             <a:srgbClr val="FFFFFF"/>
           </a:solidFill>
-          <a:ln w="8731">
+          <a:ln w="12699">
             <a:solidFill>
               <a:srgbClr val="CBD3DA"/>
             </a:solidFill>
@@ -10554,9 +10554,9 @@
               <a:spcAft>
                 <a:spcPts val="0"/>
               </a:spcAft>
-              <a:defRPr sz="1062" b="0" i="0" lang="zh-CN" dirty="0">
+              <a:defRPr sz="1062" b="1" i="0" lang="zh-CN" dirty="0">
                 <a:solidFill>
-                  <a:srgbClr val="3F4854"/>
+                  <a:srgbClr val="27303A"/>
                 </a:solidFill>
                 <a:latin typeface="DejaVu Sans"/>
                 <a:ea typeface="DejaVu Sans"/>
@@ -10564,9 +10564,9 @@
               </a:defRPr>
             </a:pPr>
             <a:r>
-              <a:rPr sz="1062" b="0" i="0" lang="zh-CN" dirty="0">
+              <a:rPr sz="1062" b="1" i="0" lang="zh-CN" dirty="0">
                 <a:solidFill>
-                  <a:srgbClr val="3F4854"/>
+                  <a:srgbClr val="27303A"/>
                 </a:solidFill>
                 <a:latin typeface="DejaVu Sans"/>
                 <a:ea typeface="DejaVu Sans"/>
